--- a/9주차/简体中文/游戏引擎基础_第9周_实操与作业指南_简体中文.pptx
+++ b/9주차/简体中文/游戏引擎基础_第9周_实操与作业指南_简体中文.pptx
@@ -140,12 +140,12 @@
   <p:extLst>
     <p:ext uri="{521415D9-36F7-43E2-AB2F-B90AF26B5E84}">
       <p14:sectionLst xmlns:p14="http://schemas.microsoft.com/office/powerpoint/2010/main">
-        <p14:section name="开始" id="{c3441066-8a10-1e1e-6cc1-aef75d0d90ac}">
+        <p14:section name="开始" id="{fae0a030-4fbe-c67d-0a29-34c1dc3ee910}">
           <p14:sldIdLst>
             <p14:sldId id="256"/>
           </p14:sldIdLst>
         </p14:section>
-        <p14:section name="实操 1" id="{d57a01a0-d853-9841-a823-4a51fc8d47c4}">
+        <p14:section name="实操 1" id="{4c2a8800-6bb6-768e-00f8-a7bf970085e6}">
           <p14:sldIdLst>
             <p14:sldId id="257"/>
             <p14:sldId id="258"/>
@@ -153,21 +153,21 @@
             <p14:sldId id="260"/>
           </p14:sldIdLst>
         </p14:section>
-        <p14:section name="实操 2" id="{d71fe917-84d3-8b2b-4bc1-083af474f7a0}">
+        <p14:section name="实操 2" id="{710cf7b5-6d78-b346-c83d-7e33a2335245}">
           <p14:sldIdLst>
             <p14:sldId id="261"/>
             <p14:sldId id="262"/>
             <p14:sldId id="263"/>
           </p14:sldIdLst>
         </p14:section>
-        <p14:section name="实操 3" id="{d8fface3-3e6c-056e-8904-debe5c8f2ead}">
+        <p14:section name="实操 3" id="{1da424ad-d831-f9ee-c3f9-1bfb49e4699e}">
           <p14:sldIdLst>
             <p14:sldId id="264"/>
             <p14:sldId id="265"/>
             <p14:sldId id="266"/>
           </p14:sldIdLst>
         </p14:section>
-        <p14:section name="实操 4" id="{950421da-aaa2-f078-7a1c-fbfd0a471429}">
+        <p14:section name="实操 4" id="{4859a3cb-4579-256a-9ce5-528f92e806ac}">
           <p14:sldIdLst>
             <p14:sldId id="267"/>
             <p14:sldId id="268"/>
@@ -176,13 +176,13 @@
             <p14:sldId id="271"/>
           </p14:sldIdLst>
         </p14:section>
-        <p14:section name="实操 5" id="{70066596-1096-ec30-666e-1d9d01cd7afa}">
+        <p14:section name="实操 5" id="{aec198d8-033b-6a71-5759-9869fcdfae89}">
           <p14:sldIdLst>
             <p14:sldId id="272"/>
             <p14:sldId id="273"/>
           </p14:sldIdLst>
         </p14:section>
-        <p14:section name="实操 6" id="{3f56d00e-0fe1-7f92-a997-304bcef6262a}">
+        <p14:section name="实操 6" id="{3fc4875e-c6e6-b072-da02-40eea1cf1b52}">
           <p14:sldIdLst>
             <p14:sldId id="274"/>
             <p14:sldId id="275"/>
@@ -193,13 +193,13 @@
             <p14:sldId id="280"/>
           </p14:sldIdLst>
         </p14:section>
-        <p14:section name="收尾" id="{d23bcaf5-bebc-a0ae-e458-6e96c078970b}">
+        <p14:section name="收尾" id="{3a6e595c-7c1f-6fa0-9480-4dee143f013a}">
           <p14:sldIdLst>
             <p14:sldId id="281"/>
             <p14:sldId id="282"/>
           </p14:sldIdLst>
         </p14:section>
-        <p14:section name="作业" id="{3068bd74-4cef-a33e-f2d4-c29bccb8d117}">
+        <p14:section name="作业" id="{88622fcd-a3cf-893d-6458-d61d7200ea22}">
           <p14:sldIdLst>
             <p14:sldId id="283"/>
             <p14:sldId id="284"/>
@@ -17311,7 +17311,7 @@
                 <a:ea typeface="Noto Sans SC" pitchFamily="34" charset="-122"/>
                 <a:cs typeface="Noto Sans SC" pitchFamily="34" charset="-120"/>
               </a:rPr>
-              <a:t>与期中不同的新游戏。一个人 5 周内能完成的大小</a:t>
+              <a:t>与期中不同的新游戏。一个人 6 周内能完成的大小</a:t>
             </a:r>
             <a:endParaRPr lang="en-US" sz="1700" dirty="0"/>
           </a:p>
@@ -31305,7 +31305,7 @@
                 <a:gridCol w="1280160"/>
                 <a:gridCol w="8348472"/>
               </a:tblGrid>
-              <a:tr h="512064">
+              <a:tr h="475488">
                 <a:tc>
                   <a:txBody>
                     <a:bodyPr/>
@@ -31511,7 +31511,7 @@
                   </a:tcPr>
                 </a:tc>
               </a:tr>
-              <a:tr h="512064">
+              <a:tr h="475488">
                 <a:tc>
                   <a:txBody>
                     <a:bodyPr/>
@@ -31717,7 +31717,7 @@
                   </a:tcPr>
                 </a:tc>
               </a:tr>
-              <a:tr h="512064">
+              <a:tr h="475488">
                 <a:tc>
                   <a:txBody>
                     <a:bodyPr/>
@@ -31923,7 +31923,7 @@
                   </a:tcPr>
                 </a:tc>
               </a:tr>
-              <a:tr h="512064">
+              <a:tr h="475488">
                 <a:tc>
                   <a:txBody>
                     <a:bodyPr/>
@@ -32129,7 +32129,7 @@
                   </a:tcPr>
                 </a:tc>
               </a:tr>
-              <a:tr h="512064">
+              <a:tr h="475488">
                 <a:tc>
                   <a:txBody>
                     <a:bodyPr/>
@@ -32335,7 +32335,7 @@
                   </a:tcPr>
                 </a:tc>
               </a:tr>
-              <a:tr h="512064">
+              <a:tr h="475488">
                 <a:tc>
                   <a:txBody>
                     <a:bodyPr/>
@@ -32489,7 +32489,7 @@
                           <a:ea typeface="Noto Sans SC" pitchFamily="34" charset="-122"/>
                           <a:cs typeface="Noto Sans SC" pitchFamily="34" charset="-120"/>
                         </a:rPr>
-                        <a:t>试玩 · 难度 · 修 bug</a:t>
+                        <a:t>试玩 · 难度</a:t>
                       </a:r>
                       <a:endParaRPr lang="en-US" sz="1400" dirty="0">
                         <a:latin typeface="Noto Sans SC" charset="0"/>
@@ -32541,7 +32541,7 @@
                   </a:tcPr>
                 </a:tc>
               </a:tr>
-              <a:tr h="512064">
+              <a:tr h="475488">
                 <a:tc>
                   <a:txBody>
                     <a:bodyPr/>
@@ -32695,7 +32695,7 @@
                           <a:ea typeface="Noto Sans SC" pitchFamily="34" charset="-122"/>
                           <a:cs typeface="Noto Sans SC" pitchFamily="34" charset="-120"/>
                         </a:rPr>
-                        <a:t>收尾 · Windows 打包 · 演示练习</a:t>
+                        <a:t>修 bug · 打磨</a:t>
                       </a:r>
                       <a:endParaRPr lang="en-US" sz="1400" dirty="0">
                         <a:latin typeface="Noto Sans SC" charset="0"/>
@@ -32747,7 +32747,7 @@
                   </a:tcPr>
                 </a:tc>
               </a:tr>
-              <a:tr h="512064">
+              <a:tr h="475488">
                 <a:tc>
                   <a:txBody>
                     <a:bodyPr/>
@@ -32893,6 +32893,76 @@
                         <a:buNone/>
                       </a:pPr>
                       <a:r>
+                        <a:rPr lang="en-US" sz="1400" dirty="0">
+                          <a:solidFill>
+                            <a:srgbClr val="3A434D"/>
+                          </a:solidFill>
+                          <a:latin typeface="Noto Sans SC" pitchFamily="34" charset="0"/>
+                          <a:ea typeface="Noto Sans SC" pitchFamily="34" charset="-122"/>
+                          <a:cs typeface="Noto Sans SC" pitchFamily="34" charset="-120"/>
+                        </a:rPr>
+                        <a:t>收尾 · Windows 打包 · 演示练习</a:t>
+                      </a:r>
+                      <a:endParaRPr lang="en-US" sz="1400" dirty="0">
+                        <a:latin typeface="Noto Sans SC" charset="0"/>
+                        <a:ea typeface="Noto Sans SC" charset="0"/>
+                        <a:cs typeface="Noto Sans SC" charset="0"/>
+                      </a:endParaRPr>
+                    </a:p>
+                  </a:txBody>
+                  <a:tcPr marL="91440" marR="91440" marT="54864" marB="54864" anchor="ctr">
+                    <a:lnL w="9525" cap="flat" cmpd="sng" algn="ctr">
+                      <a:solidFill>
+                        <a:srgbClr val="D9DEE4"/>
+                      </a:solidFill>
+                      <a:prstDash val="solid"/>
+                      <a:round/>
+                      <a:headEnd type="none" w="med" len="med"/>
+                      <a:tailEnd type="none" w="med" len="med"/>
+                    </a:lnL>
+                    <a:lnR w="9525" cap="flat" cmpd="sng" algn="ctr">
+                      <a:solidFill>
+                        <a:srgbClr val="D9DEE4"/>
+                      </a:solidFill>
+                      <a:prstDash val="solid"/>
+                      <a:round/>
+                      <a:headEnd type="none" w="med" len="med"/>
+                      <a:tailEnd type="none" w="med" len="med"/>
+                    </a:lnR>
+                    <a:lnT w="9525" cap="flat" cmpd="sng" algn="ctr">
+                      <a:solidFill>
+                        <a:srgbClr val="D9DEE4"/>
+                      </a:solidFill>
+                      <a:prstDash val="solid"/>
+                      <a:round/>
+                      <a:headEnd type="none" w="med" len="med"/>
+                      <a:tailEnd type="none" w="med" len="med"/>
+                    </a:lnT>
+                    <a:lnB w="9525" cap="flat" cmpd="sng" algn="ctr">
+                      <a:solidFill>
+                        <a:srgbClr val="D9DEE4"/>
+                      </a:solidFill>
+                      <a:prstDash val="solid"/>
+                      <a:round/>
+                      <a:headEnd type="none" w="med" len="med"/>
+                      <a:tailEnd type="none" w="med" len="med"/>
+                    </a:lnB>
+                    <a:solidFill>
+                      <a:srgbClr val="FFFFFF"/>
+                    </a:solidFill>
+                  </a:tcPr>
+                </a:tc>
+              </a:tr>
+              <a:tr h="475488">
+                <a:tc>
+                  <a:txBody>
+                    <a:bodyPr/>
+                    <a:lstStyle/>
+                    <a:p>
+                      <a:pPr algn="ctr" indent="0" marL="0">
+                        <a:buNone/>
+                      </a:pPr>
+                      <a:r>
                         <a:rPr lang="en-US" sz="1400" b="1" dirty="0">
                           <a:solidFill>
                             <a:srgbClr val="3A434D"/>
@@ -32901,7 +32971,143 @@
                           <a:ea typeface="Noto Sans SC" pitchFamily="34" charset="-122"/>
                           <a:cs typeface="Noto Sans SC" pitchFamily="34" charset="-120"/>
                         </a:rPr>
-                        <a:t>期末演示</a:t>
+                        <a:t>第 16 周</a:t>
+                      </a:r>
+                      <a:endParaRPr lang="en-US" sz="1400" dirty="0">
+                        <a:latin typeface="Noto Sans SC" charset="0"/>
+                        <a:ea typeface="Noto Sans SC" charset="0"/>
+                        <a:cs typeface="Noto Sans SC" charset="0"/>
+                      </a:endParaRPr>
+                    </a:p>
+                  </a:txBody>
+                  <a:tcPr marL="91440" marR="91440" marT="54864" marB="54864" anchor="ctr">
+                    <a:lnL w="9525" cap="flat" cmpd="sng" algn="ctr">
+                      <a:solidFill>
+                        <a:srgbClr val="D9DEE4"/>
+                      </a:solidFill>
+                      <a:prstDash val="solid"/>
+                      <a:round/>
+                      <a:headEnd type="none" w="med" len="med"/>
+                      <a:tailEnd type="none" w="med" len="med"/>
+                    </a:lnL>
+                    <a:lnR w="9525" cap="flat" cmpd="sng" algn="ctr">
+                      <a:solidFill>
+                        <a:srgbClr val="D9DEE4"/>
+                      </a:solidFill>
+                      <a:prstDash val="solid"/>
+                      <a:round/>
+                      <a:headEnd type="none" w="med" len="med"/>
+                      <a:tailEnd type="none" w="med" len="med"/>
+                    </a:lnR>
+                    <a:lnT w="9525" cap="flat" cmpd="sng" algn="ctr">
+                      <a:solidFill>
+                        <a:srgbClr val="D9DEE4"/>
+                      </a:solidFill>
+                      <a:prstDash val="solid"/>
+                      <a:round/>
+                      <a:headEnd type="none" w="med" len="med"/>
+                      <a:tailEnd type="none" w="med" len="med"/>
+                    </a:lnT>
+                    <a:lnB w="9525" cap="flat" cmpd="sng" algn="ctr">
+                      <a:solidFill>
+                        <a:srgbClr val="D9DEE4"/>
+                      </a:solidFill>
+                      <a:prstDash val="solid"/>
+                      <a:round/>
+                      <a:headEnd type="none" w="med" len="med"/>
+                      <a:tailEnd type="none" w="med" len="med"/>
+                    </a:lnB>
+                    <a:solidFill>
+                      <a:srgbClr val="F3F5F7"/>
+                    </a:solidFill>
+                  </a:tcPr>
+                </a:tc>
+                <a:tc>
+                  <a:txBody>
+                    <a:bodyPr/>
+                    <a:lstStyle/>
+                    <a:p>
+                      <a:pPr algn="ctr" indent="0" marL="0">
+                        <a:buNone/>
+                      </a:pPr>
+                      <a:r>
+                        <a:rPr lang="en-US" sz="1400" dirty="0">
+                          <a:solidFill>
+                            <a:srgbClr val="3A434D"/>
+                          </a:solidFill>
+                          <a:latin typeface="Noto Sans SC" pitchFamily="34" charset="0"/>
+                          <a:ea typeface="Noto Sans SC" pitchFamily="34" charset="-122"/>
+                          <a:cs typeface="Noto Sans SC" pitchFamily="34" charset="-120"/>
+                        </a:rPr>
+                        <a:t>12/21</a:t>
+                      </a:r>
+                      <a:endParaRPr lang="en-US" sz="1400" dirty="0">
+                        <a:latin typeface="Noto Sans SC" charset="0"/>
+                        <a:ea typeface="Noto Sans SC" charset="0"/>
+                        <a:cs typeface="Noto Sans SC" charset="0"/>
+                      </a:endParaRPr>
+                    </a:p>
+                  </a:txBody>
+                  <a:tcPr marL="91440" marR="91440" marT="54864" marB="54864" anchor="ctr">
+                    <a:lnL w="9525" cap="flat" cmpd="sng" algn="ctr">
+                      <a:solidFill>
+                        <a:srgbClr val="D9DEE4"/>
+                      </a:solidFill>
+                      <a:prstDash val="solid"/>
+                      <a:round/>
+                      <a:headEnd type="none" w="med" len="med"/>
+                      <a:tailEnd type="none" w="med" len="med"/>
+                    </a:lnL>
+                    <a:lnR w="9525" cap="flat" cmpd="sng" algn="ctr">
+                      <a:solidFill>
+                        <a:srgbClr val="D9DEE4"/>
+                      </a:solidFill>
+                      <a:prstDash val="solid"/>
+                      <a:round/>
+                      <a:headEnd type="none" w="med" len="med"/>
+                      <a:tailEnd type="none" w="med" len="med"/>
+                    </a:lnR>
+                    <a:lnT w="9525" cap="flat" cmpd="sng" algn="ctr">
+                      <a:solidFill>
+                        <a:srgbClr val="D9DEE4"/>
+                      </a:solidFill>
+                      <a:prstDash val="solid"/>
+                      <a:round/>
+                      <a:headEnd type="none" w="med" len="med"/>
+                      <a:tailEnd type="none" w="med" len="med"/>
+                    </a:lnT>
+                    <a:lnB w="9525" cap="flat" cmpd="sng" algn="ctr">
+                      <a:solidFill>
+                        <a:srgbClr val="D9DEE4"/>
+                      </a:solidFill>
+                      <a:prstDash val="solid"/>
+                      <a:round/>
+                      <a:headEnd type="none" w="med" len="med"/>
+                      <a:tailEnd type="none" w="med" len="med"/>
+                    </a:lnB>
+                    <a:solidFill>
+                      <a:srgbClr val="FFFFFF"/>
+                    </a:solidFill>
+                  </a:tcPr>
+                </a:tc>
+                <a:tc>
+                  <a:txBody>
+                    <a:bodyPr/>
+                    <a:lstStyle/>
+                    <a:p>
+                      <a:pPr algn="l" indent="0" marL="0">
+                        <a:buNone/>
+                      </a:pPr>
+                      <a:r>
+                        <a:rPr lang="en-US" sz="1400" b="1" dirty="0">
+                          <a:solidFill>
+                            <a:srgbClr val="3A434D"/>
+                          </a:solidFill>
+                          <a:latin typeface="Noto Sans SC" pitchFamily="34" charset="0"/>
+                          <a:ea typeface="Noto Sans SC" pitchFamily="34" charset="-122"/>
+                          <a:cs typeface="Noto Sans SC" pitchFamily="34" charset="-120"/>
+                        </a:rPr>
+                        <a:t>期末演示（期末考试）</a:t>
                       </a:r>
                       <a:endParaRPr lang="en-US" sz="1400" dirty="0">
                         <a:latin typeface="Noto Sans SC" charset="0"/>
@@ -40552,7 +40758,7 @@
                   <a:srgbClr val="1E242B"/>
                 </a:solidFill>
               </a:rPr>
-              <a:t>规模检查 — 一个人 5 周能完成吗</a:t>
+              <a:t>规模检查 — 一个人 6 周能完成吗</a:t>
             </a:r>
             <a:endParaRPr lang="en-US" sz="2800" dirty="0"/>
           </a:p>
